--- a/docs/diagrams/PPT/order_management_system_presentation.pptx
+++ b/docs/diagrams/PPT/order_management_system_presentation.pptx
@@ -9,6 +9,9 @@
     <p:sldId id="257" r:id="rId8"/>
     <p:sldId id="258" r:id="rId9"/>
     <p:sldId id="259" r:id="rId10"/>
+    <p:sldId id="265" r:id="rId16"/>
+    <p:sldId id="266" r:id="rId17"/>
+    <p:sldId id="267" r:id="rId18"/>
     <p:sldId id="260" r:id="rId11"/>
     <p:sldId id="261" r:id="rId12"/>
     <p:sldId id="262" r:id="rId13"/>
@@ -3217,6 +3220,2803 @@
             </a:pPr>
             <a:r>
               <a:t>Product &amp; Architecture Overview</a:t>
+            </a:r>
+          </a:p>
+        </p:txBody>
+      </p:sp>
+    </p:spTree>
+  </p:cSld>
+  <p:clrMapOvr>
+    <a:masterClrMapping/>
+  </p:clrMapOvr>
+</p:sld>
+</file>
+
+<file path=ppt/slides/slide10.xml><?xml version="1.0" encoding="utf-8"?>
+<p:sld xmlns:a="http://schemas.openxmlformats.org/drawingml/2006/main" xmlns:p="http://schemas.openxmlformats.org/presentationml/2006/main" xmlns:r="http://schemas.openxmlformats.org/officeDocument/2006/relationships">
+  <p:cSld>
+    <p:bg>
+      <p:bgPr>
+        <a:solidFill>
+          <a:srgbClr val="0F172A"/>
+        </a:solidFill>
+        <a:effectLst/>
+      </p:bgPr>
+    </p:bg>
+    <p:spTree>
+      <p:nvGrpSpPr>
+        <p:cNvPr id="1" name=""/>
+        <p:cNvGrpSpPr/>
+        <p:nvPr/>
+      </p:nvGrpSpPr>
+      <p:grpSpPr/>
+      <p:sp>
+        <p:nvSpPr>
+          <p:cNvPr id="100" name="Accent"/>
+          <p:cNvSpPr/>
+          <p:nvPr/>
+        </p:nvSpPr>
+        <p:spPr>
+          <a:xfrm>
+            <a:off x="0" y="0"/>
+            <a:ext cx="365760" cy="6858000"/>
+          </a:xfrm>
+          <a:prstGeom prst="rect">
+            <a:avLst/>
+          </a:prstGeom>
+          <a:solidFill>
+            <a:srgbClr val="6366F1"/>
+          </a:solidFill>
+          <a:ln>
+            <a:solidFill>
+              <a:srgbClr val="6366F1"/>
+            </a:solidFill>
+          </a:ln>
+        </p:spPr>
+        <p:style>
+          <a:lnRef idx="1">
+            <a:schemeClr val="accent1"/>
+          </a:lnRef>
+          <a:fillRef idx="3">
+            <a:schemeClr val="accent1"/>
+          </a:fillRef>
+          <a:effectRef idx="2">
+            <a:schemeClr val="accent1"/>
+          </a:effectRef>
+          <a:fontRef idx="minor">
+            <a:schemeClr val="lt1"/>
+          </a:fontRef>
+        </p:style>
+        <p:txBody>
+          <a:bodyPr rtlCol="0" anchor="ctr"/>
+          <a:lstStyle/>
+          <a:p>
+            <a:pPr algn="ctr"/>
+          </a:p>
+        </p:txBody>
+      </p:sp>
+      <p:sp>
+        <p:nvSpPr>
+          <p:cNvPr id="2" name="Title"/>
+          <p:cNvSpPr txBox="1"/>
+          <p:nvPr/>
+        </p:nvSpPr>
+        <p:spPr>
+          <a:xfrm>
+            <a:off x="731520" y="548640"/>
+            <a:ext cx="10698480" cy="1100000"/>
+          </a:xfrm>
+          <a:prstGeom prst="rect">
+            <a:avLst/>
+          </a:prstGeom>
+          <a:noFill/>
+        </p:spPr>
+        <p:txBody>
+          <a:bodyPr wrap="square" lIns="0" tIns="0" rIns="0" bIns="0">
+            <a:spAutoFit/>
+          </a:bodyPr>
+          <a:lstStyle/>
+          <a:p>
+            <a:pPr>
+              <a:defRPr sz="3600" b="1">
+                <a:solidFill>
+                  <a:srgbClr val="F8FAFC"/>
+                </a:solidFill>
+                <a:latin typeface="Arial"/>
+              </a:defRPr>
+            </a:pPr>
+            <a:r>
+              <a:t>Event Sourcing: Immutable State as Facts</a:t>
+            </a:r>
+          </a:p>
+          <a:p>
+            <a:pPr>
+              <a:spcBef>
+                <a:spcPts val="800"/>
+              </a:spcBef>
+              <a:defRPr sz="1800">
+                <a:solidFill>
+                  <a:srgbClr val="14B8A6"/>
+                </a:solidFill>
+                <a:latin typeface="Arial"/>
+              </a:defRPr>
+            </a:pPr>
+            <a:r>
+              <a:t>Every state change is a permanent, ordered event — never an overwrite</a:t>
+            </a:r>
+          </a:p>
+        </p:txBody>
+      </p:sp>
+      <p:sp>
+        <p:nvSpPr>
+          <p:cNvPr id="3" name="Box 3"/>
+          <p:cNvSpPr/>
+          <p:nvPr/>
+        </p:nvSpPr>
+        <p:spPr>
+          <a:xfrm>
+            <a:off x="731520" y="1750000"/>
+            <a:ext cx="3200000" cy="4700000"/>
+          </a:xfrm>
+          <a:prstGeom prst="roundRect">
+            <a:avLst>
+              <a:gd name="adj" fmla="val 16667"/>
+            </a:avLst>
+          </a:prstGeom>
+          <a:solidFill>
+            <a:srgbClr val="1E293B"/>
+          </a:solidFill>
+          <a:ln w="19050">
+            <a:solidFill>
+              <a:srgbClr val="334155"/>
+            </a:solidFill>
+          </a:ln>
+        </p:spPr>
+        <p:txBody>
+          <a:bodyPr wrap="square" lIns="180000" tIns="180000" rIns="180000" bIns="180000">
+            <a:spAutoFit/>
+          </a:bodyPr>
+          <a:lstStyle/>
+          <a:p>
+            <a:pPr>
+              <a:defRPr sz="1400" b="1">
+                <a:solidFill>
+                  <a:srgbClr val="F8FAFC"/>
+                </a:solidFill>
+                <a:latin typeface="Arial"/>
+              </a:defRPr>
+            </a:pPr>
+            <a:r>
+              <a:t>What is Event Sourcing?</a:t>
+            </a:r>
+          </a:p>
+          <a:p>
+            <a:pPr>
+              <a:spcBef>
+                <a:spcPts val="300"/>
+              </a:spcBef>
+              <a:defRPr sz="1200">
+                <a:solidFill>
+                  <a:srgbClr val="CBD5E1"/>
+                </a:solidFill>
+                <a:latin typeface="Arial"/>
+              </a:defRPr>
+            </a:pPr>
+            <a:r>
+              <a:t>• State is NEVER stored directly in a row</a:t>
+            </a:r>
+          </a:p>
+          <a:p>
+            <a:pPr>
+              <a:spcBef>
+                <a:spcPts val="300"/>
+              </a:spcBef>
+              <a:defRPr sz="1200">
+                <a:solidFill>
+                  <a:srgbClr val="CBD5E1"/>
+                </a:solidFill>
+                <a:latin typeface="Arial"/>
+              </a:defRPr>
+            </a:pPr>
+            <a:r>
+              <a:t>• Every change raises an immutable DomainEvent</a:t>
+            </a:r>
+          </a:p>
+          <a:p>
+            <a:pPr>
+              <a:spcBef>
+                <a:spcPts val="300"/>
+              </a:spcBef>
+              <a:defRPr sz="1200">
+                <a:solidFill>
+                  <a:srgbClr val="CBD5E1"/>
+                </a:solidFill>
+                <a:latin typeface="Arial"/>
+              </a:defRPr>
+            </a:pPr>
+            <a:r>
+              <a:t>• Current state = replay of all past events</a:t>
+            </a:r>
+          </a:p>
+          <a:p>
+            <a:pPr>
+              <a:spcBef>
+                <a:spcPts val="300"/>
+              </a:spcBef>
+              <a:defRPr sz="1200">
+                <a:solidFill>
+                  <a:srgbClr val="CBD5E1"/>
+                </a:solidFill>
+                <a:latin typeface="Arial"/>
+              </a:defRPr>
+            </a:pPr>
+            <a:r>
+              <a:t>• 13 sealed event types (Java 21):</a:t>
+            </a:r>
+          </a:p>
+          <a:p>
+            <a:pPr>
+              <a:spcBef>
+                <a:spcPts val="300"/>
+              </a:spcBef>
+              <a:defRPr sz="1200">
+                <a:solidFill>
+                  <a:srgbClr val="CBD5E1"/>
+                </a:solidFill>
+                <a:latin typeface="Arial"/>
+              </a:defRPr>
+            </a:pPr>
+            <a:r>
+              <a:t>  OrderCreatedEvent, ItemAddedEvent,</a:t>
+            </a:r>
+          </a:p>
+          <a:p>
+            <a:pPr>
+              <a:spcBef>
+                <a:spcPts val="300"/>
+              </a:spcBef>
+              <a:defRPr sz="1200">
+                <a:solidFill>
+                  <a:srgbClr val="CBD5E1"/>
+                </a:solidFill>
+                <a:latin typeface="Arial"/>
+              </a:defRPr>
+            </a:pPr>
+            <a:r>
+              <a:t>  OrderConfirmedEvent, PaymentCompletedEvent,</a:t>
+            </a:r>
+          </a:p>
+          <a:p>
+            <a:pPr>
+              <a:spcBef>
+                <a:spcPts val="300"/>
+              </a:spcBef>
+              <a:defRPr sz="1200">
+                <a:solidFill>
+                  <a:srgbClr val="CBD5E1"/>
+                </a:solidFill>
+                <a:latin typeface="Arial"/>
+              </a:defRPr>
+            </a:pPr>
+            <a:r>
+              <a:t>  ShipmentCreatedEvent, OrderCancelledEvent…</a:t>
+            </a:r>
+          </a:p>
+          <a:p>
+            <a:pPr>
+              <a:spcBef>
+                <a:spcPts val="300"/>
+              </a:spcBef>
+              <a:defRPr sz="1200">
+                <a:solidFill>
+                  <a:srgbClr val="CBD5E1"/>
+                </a:solidFill>
+                <a:latin typeface="Arial"/>
+              </a:defRPr>
+            </a:pPr>
+            <a:r>
+              <a:t>• Events stored as JSONB in append-only</a:t>
+            </a:r>
+          </a:p>
+          <a:p>
+            <a:pPr>
+              <a:spcBef>
+                <a:spcPts val="300"/>
+              </a:spcBef>
+              <a:defRPr sz="1200">
+                <a:solidFill>
+                  <a:srgbClr val="CBD5E1"/>
+                </a:solidFill>
+                <a:latin typeface="Arial"/>
+              </a:defRPr>
+            </a:pPr>
+            <a:r>
+              <a:t>  event_store table (no UPDATE, no DELETE)</a:t>
+            </a:r>
+          </a:p>
+        </p:txBody>
+      </p:sp>
+      <p:sp>
+        <p:nvSpPr>
+          <p:cNvPr id="4" name="Box 4"/>
+          <p:cNvSpPr/>
+          <p:nvPr/>
+        </p:nvSpPr>
+        <p:spPr>
+          <a:xfrm>
+            <a:off x="4113520" y="1750000"/>
+            <a:ext cx="3200000" cy="4700000"/>
+          </a:xfrm>
+          <a:prstGeom prst="roundRect">
+            <a:avLst>
+              <a:gd name="adj" fmla="val 16667"/>
+            </a:avLst>
+          </a:prstGeom>
+          <a:solidFill>
+            <a:srgbClr val="1E293B"/>
+          </a:solidFill>
+          <a:ln w="19050">
+            <a:solidFill>
+              <a:srgbClr val="334155"/>
+            </a:solidFill>
+          </a:ln>
+        </p:spPr>
+        <p:txBody>
+          <a:bodyPr wrap="square" lIns="180000" tIns="180000" rIns="180000" bIns="180000">
+            <a:spAutoFit/>
+          </a:bodyPr>
+          <a:lstStyle/>
+          <a:p>
+            <a:pPr>
+              <a:defRPr sz="1400" b="1">
+                <a:solidFill>
+                  <a:srgbClr val="F8FAFC"/>
+                </a:solidFill>
+                <a:latin typeface="Arial"/>
+              </a:defRPr>
+            </a:pPr>
+            <a:r>
+              <a:t>Aggregate Root: Order.java</a:t>
+            </a:r>
+          </a:p>
+          <a:p>
+            <a:pPr>
+              <a:spcBef>
+                <a:spcPts val="300"/>
+              </a:spcBef>
+              <a:defRPr sz="1200">
+                <a:solidFill>
+                  <a:srgbClr val="CBD5E1"/>
+                </a:solidFill>
+                <a:latin typeface="Arial"/>
+              </a:defRPr>
+            </a:pPr>
+            <a:r>
+              <a:t>• Private fields — NO setters</a:t>
+            </a:r>
+          </a:p>
+          <a:p>
+            <a:pPr>
+              <a:spcBef>
+                <a:spcPts val="300"/>
+              </a:spcBef>
+              <a:defRPr sz="1200">
+                <a:solidFill>
+                  <a:srgbClr val="CBD5E1"/>
+                </a:solidFill>
+                <a:latin typeface="Arial"/>
+              </a:defRPr>
+            </a:pPr>
+            <a:r>
+              <a:t>• command → validate → raise event</a:t>
+            </a:r>
+          </a:p>
+          <a:p>
+            <a:pPr>
+              <a:spcBef>
+                <a:spcPts val="300"/>
+              </a:spcBef>
+              <a:defRPr sz="1200">
+                <a:solidFill>
+                  <a:srgbClr val="CBD5E1"/>
+                </a:solidFill>
+                <a:latin typeface="Arial"/>
+              </a:defRPr>
+            </a:pPr>
+            <a:r>
+              <a:t>• apply(DomainEvent) = ONLY mutation point</a:t>
+            </a:r>
+          </a:p>
+          <a:p>
+            <a:pPr>
+              <a:spcBef>
+                <a:spcPts val="300"/>
+              </a:spcBef>
+              <a:defRPr sz="1200">
+                <a:solidFill>
+                  <a:srgbClr val="CBD5E1"/>
+                </a:solidFill>
+                <a:latin typeface="Arial"/>
+              </a:defRPr>
+            </a:pPr>
+            <a:r>
+              <a:t>• pendingEvents[] drained by repository</a:t>
+            </a:r>
+          </a:p>
+          <a:p>
+            <a:pPr>
+              <a:spcBef>
+                <a:spcPts val="300"/>
+              </a:spcBef>
+              <a:defRPr sz="1200">
+                <a:solidFill>
+                  <a:srgbClr val="CBD5E1"/>
+                </a:solidFill>
+                <a:latin typeface="Arial"/>
+              </a:defRPr>
+            </a:pPr>
+            <a:r>
+              <a:t>• Optimistic lock: UNIQUE(aggregate_id, version)</a:t>
+            </a:r>
+          </a:p>
+          <a:p>
+            <a:pPr>
+              <a:spcBef>
+                <a:spcPts val="300"/>
+              </a:spcBef>
+              <a:defRPr sz="1200">
+                <a:solidFill>
+                  <a:srgbClr val="CBD5E1"/>
+                </a:solidFill>
+                <a:latin typeface="Arial"/>
+              </a:defRPr>
+            </a:pPr>
+            <a:r>
+              <a:t>  DB constraint + app-level version check</a:t>
+            </a:r>
+          </a:p>
+          <a:p>
+            <a:pPr>
+              <a:spcBef>
+                <a:spcPts val="300"/>
+              </a:spcBef>
+              <a:defRPr sz="1200">
+                <a:solidFill>
+                  <a:srgbClr val="CBD5E1"/>
+                </a:solidFill>
+                <a:latin typeface="Arial"/>
+              </a:defRPr>
+            </a:pPr>
+            <a:r>
+              <a:t>• Snapshot every 50 events:</a:t>
+            </a:r>
+          </a:p>
+          <a:p>
+            <a:pPr>
+              <a:spcBef>
+                <a:spcPts val="300"/>
+              </a:spcBef>
+              <a:defRPr sz="1200">
+                <a:solidFill>
+                  <a:srgbClr val="CBD5E1"/>
+                </a:solidFill>
+                <a:latin typeface="Arial"/>
+              </a:defRPr>
+            </a:pPr>
+            <a:r>
+              <a:t>  restore snapshot → replay since snapshot</a:t>
+            </a:r>
+          </a:p>
+          <a:p>
+            <a:pPr>
+              <a:spcBef>
+                <a:spcPts val="300"/>
+              </a:spcBef>
+              <a:defRPr sz="1200">
+                <a:solidFill>
+                  <a:srgbClr val="CBD5E1"/>
+                </a:solidFill>
+                <a:latin typeface="Arial"/>
+              </a:defRPr>
+            </a:pPr>
+            <a:r>
+              <a:t>  worst-case: 50 events replayed, ever</a:t>
+            </a:r>
+          </a:p>
+        </p:txBody>
+      </p:sp>
+      <p:sp>
+        <p:nvSpPr>
+          <p:cNvPr id="5" name="Box 5"/>
+          <p:cNvSpPr/>
+          <p:nvPr/>
+        </p:nvSpPr>
+        <p:spPr>
+          <a:xfrm>
+            <a:off x="7495520" y="1750000"/>
+            <a:ext cx="3200000" cy="4700000"/>
+          </a:xfrm>
+          <a:prstGeom prst="roundRect">
+            <a:avLst>
+              <a:gd name="adj" fmla="val 16667"/>
+            </a:avLst>
+          </a:prstGeom>
+          <a:solidFill>
+            <a:srgbClr val="1E293B"/>
+          </a:solidFill>
+          <a:ln w="19050">
+            <a:solidFill>
+              <a:srgbClr val="334155"/>
+            </a:solidFill>
+          </a:ln>
+        </p:spPr>
+        <p:txBody>
+          <a:bodyPr wrap="square" lIns="180000" tIns="180000" rIns="180000" bIns="180000">
+            <a:spAutoFit/>
+          </a:bodyPr>
+          <a:lstStyle/>
+          <a:p>
+            <a:pPr>
+              <a:defRPr sz="1400" b="1">
+                <a:solidFill>
+                  <a:srgbClr val="F8FAFC"/>
+                </a:solidFill>
+                <a:latin typeface="Arial"/>
+              </a:defRPr>
+            </a:pPr>
+            <a:r>
+              <a:t>Why vs. Traditional CRUD?</a:t>
+            </a:r>
+          </a:p>
+          <a:p>
+            <a:pPr>
+              <a:spcBef>
+                <a:spcPts val="300"/>
+              </a:spcBef>
+              <a:defRPr sz="1200">
+                <a:solidFill>
+                  <a:srgbClr val="CBD5E1"/>
+                </a:solidFill>
+                <a:latin typeface="Arial"/>
+              </a:defRPr>
+            </a:pPr>
+            <a:r>
+              <a:t>• CRUD overwrites — history is gone</a:t>
+            </a:r>
+          </a:p>
+          <a:p>
+            <a:pPr>
+              <a:spcBef>
+                <a:spcPts val="300"/>
+              </a:spcBef>
+              <a:defRPr sz="1200">
+                <a:solidFill>
+                  <a:srgbClr val="CBD5E1"/>
+                </a:solidFill>
+                <a:latin typeface="Arial"/>
+              </a:defRPr>
+            </a:pPr>
+            <a:r>
+              <a:t>• Event Sourcing: full audit trail always</a:t>
+            </a:r>
+          </a:p>
+          <a:p>
+            <a:pPr>
+              <a:spcBef>
+                <a:spcPts val="300"/>
+              </a:spcBef>
+              <a:defRPr sz="1200">
+                <a:solidFill>
+                  <a:srgbClr val="CBD5E1"/>
+                </a:solidFill>
+                <a:latin typeface="Arial"/>
+              </a:defRPr>
+            </a:pPr>
+            <a:r>
+              <a:t>• PaymentFailedEvent stores failure reason</a:t>
+            </a:r>
+          </a:p>
+          <a:p>
+            <a:pPr>
+              <a:spcBef>
+                <a:spcPts val="300"/>
+              </a:spcBef>
+              <a:defRPr sz="1200">
+                <a:solidFill>
+                  <a:srgbClr val="CBD5E1"/>
+                </a:solidFill>
+                <a:latin typeface="Arial"/>
+              </a:defRPr>
+            </a:pPr>
+            <a:r>
+              <a:t>• InventoryReleasedEvent proves compensation ran</a:t>
+            </a:r>
+          </a:p>
+          <a:p>
+            <a:pPr>
+              <a:spcBef>
+                <a:spcPts val="300"/>
+              </a:spcBef>
+              <a:defRPr sz="1200">
+                <a:solidFill>
+                  <a:srgbClr val="CBD5E1"/>
+                </a:solidFill>
+                <a:latin typeface="Arial"/>
+              </a:defRPr>
+            </a:pPr>
+            <a:r>
+              <a:t>• Debug any point-in-time by replaying to Tv</a:t>
+            </a:r>
+          </a:p>
+          <a:p>
+            <a:pPr>
+              <a:spcBef>
+                <a:spcPts val="300"/>
+              </a:spcBef>
+              <a:defRPr sz="1200">
+                <a:solidFill>
+                  <a:srgbClr val="CBD5E1"/>
+                </a:solidFill>
+                <a:latin typeface="Arial"/>
+              </a:defRPr>
+            </a:pPr>
+            <a:r>
+              <a:t>• Build new read models from old events</a:t>
+            </a:r>
+          </a:p>
+          <a:p>
+            <a:pPr>
+              <a:spcBef>
+                <a:spcPts val="300"/>
+              </a:spcBef>
+              <a:defRPr sz="1200">
+                <a:solidFill>
+                  <a:srgbClr val="CBD5E1"/>
+                </a:solidFill>
+                <a:latin typeface="Arial"/>
+              </a:defRPr>
+            </a:pPr>
+            <a:r>
+              <a:t>• Used alongside Temporal: Temporal manages</a:t>
+            </a:r>
+          </a:p>
+          <a:p>
+            <a:pPr>
+              <a:spcBef>
+                <a:spcPts val="300"/>
+              </a:spcBef>
+              <a:defRPr sz="1200">
+                <a:solidFill>
+                  <a:srgbClr val="CBD5E1"/>
+                </a:solidFill>
+                <a:latin typeface="Arial"/>
+              </a:defRPr>
+            </a:pPr>
+            <a:r>
+              <a:t>  PROCESS state; Event Store manages</a:t>
+            </a:r>
+          </a:p>
+          <a:p>
+            <a:pPr>
+              <a:spcBef>
+                <a:spcPts val="300"/>
+              </a:spcBef>
+              <a:defRPr sz="1200">
+                <a:solidFill>
+                  <a:srgbClr val="CBD5E1"/>
+                </a:solidFill>
+                <a:latin typeface="Arial"/>
+              </a:defRPr>
+            </a:pPr>
+            <a:r>
+              <a:t>  DOMAIN state — complementary, not overlapping</a:t>
+            </a:r>
+          </a:p>
+        </p:txBody>
+      </p:sp>
+    </p:spTree>
+  </p:cSld>
+  <p:clrMapOvr>
+    <a:masterClrMapping/>
+  </p:clrMapOvr>
+</p:sld>
+</file>
+
+<file path=ppt/slides/slide11.xml><?xml version="1.0" encoding="utf-8"?>
+<p:sld xmlns:a="http://schemas.openxmlformats.org/drawingml/2006/main" xmlns:p="http://schemas.openxmlformats.org/presentationml/2006/main" xmlns:r="http://schemas.openxmlformats.org/officeDocument/2006/relationships">
+  <p:cSld>
+    <p:bg>
+      <p:bgPr>
+        <a:solidFill>
+          <a:srgbClr val="0F172A"/>
+        </a:solidFill>
+        <a:effectLst/>
+      </p:bgPr>
+    </p:bg>
+    <p:spTree>
+      <p:nvGrpSpPr>
+        <p:cNvPr id="1" name=""/>
+        <p:cNvGrpSpPr/>
+        <p:nvPr/>
+      </p:nvGrpSpPr>
+      <p:grpSpPr/>
+      <p:sp>
+        <p:nvSpPr>
+          <p:cNvPr id="100" name="Accent"/>
+          <p:cNvSpPr/>
+          <p:nvPr/>
+        </p:nvSpPr>
+        <p:spPr>
+          <a:xfrm>
+            <a:off x="0" y="0"/>
+            <a:ext cx="365760" cy="6858000"/>
+          </a:xfrm>
+          <a:prstGeom prst="rect">
+            <a:avLst/>
+          </a:prstGeom>
+          <a:solidFill>
+            <a:srgbClr val="6366F1"/>
+          </a:solidFill>
+          <a:ln>
+            <a:solidFill>
+              <a:srgbClr val="6366F1"/>
+            </a:solidFill>
+          </a:ln>
+        </p:spPr>
+        <p:style>
+          <a:lnRef idx="1">
+            <a:schemeClr val="accent1"/>
+          </a:lnRef>
+          <a:fillRef idx="3">
+            <a:schemeClr val="accent1"/>
+          </a:fillRef>
+          <a:effectRef idx="2">
+            <a:schemeClr val="accent1"/>
+          </a:effectRef>
+          <a:fontRef idx="minor">
+            <a:schemeClr val="lt1"/>
+          </a:fontRef>
+        </p:style>
+        <p:txBody>
+          <a:bodyPr rtlCol="0" anchor="ctr"/>
+          <a:lstStyle/>
+          <a:p>
+            <a:pPr algn="ctr"/>
+          </a:p>
+        </p:txBody>
+      </p:sp>
+      <p:sp>
+        <p:nvSpPr>
+          <p:cNvPr id="2" name="Title"/>
+          <p:cNvSpPr txBox="1"/>
+          <p:nvPr/>
+        </p:nvSpPr>
+        <p:spPr>
+          <a:xfrm>
+            <a:off x="731520" y="548640"/>
+            <a:ext cx="10698480" cy="1100000"/>
+          </a:xfrm>
+          <a:prstGeom prst="rect">
+            <a:avLst/>
+          </a:prstGeom>
+          <a:noFill/>
+        </p:spPr>
+        <p:txBody>
+          <a:bodyPr wrap="square" lIns="0" tIns="0" rIns="0" bIns="0">
+            <a:spAutoFit/>
+          </a:bodyPr>
+          <a:lstStyle/>
+          <a:p>
+            <a:pPr>
+              <a:defRPr sz="3600" b="1">
+                <a:solidFill>
+                  <a:srgbClr val="F8FAFC"/>
+                </a:solidFill>
+                <a:latin typeface="Arial"/>
+              </a:defRPr>
+            </a:pPr>
+            <a:r>
+              <a:t>Hexagonal Architecture + CQRS</a:t>
+            </a:r>
+          </a:p>
+          <a:p>
+            <a:pPr>
+              <a:spcBef>
+                <a:spcPts val="800"/>
+              </a:spcBef>
+              <a:defRPr sz="1800">
+                <a:solidFill>
+                  <a:srgbClr val="14B8A6"/>
+                </a:solidFill>
+                <a:latin typeface="Arial"/>
+              </a:defRPr>
+            </a:pPr>
+            <a:r>
+              <a:t>Domain has zero framework dependencies — all external concerns plug in through interfaces</a:t>
+            </a:r>
+          </a:p>
+        </p:txBody>
+      </p:sp>
+      <p:sp>
+        <p:nvSpPr>
+          <p:cNvPr id="3" name="Box 3"/>
+          <p:cNvSpPr/>
+          <p:nvPr/>
+        </p:nvSpPr>
+        <p:spPr>
+          <a:xfrm>
+            <a:off x="731520" y="1750000"/>
+            <a:ext cx="2350000" cy="4700000"/>
+          </a:xfrm>
+          <a:prstGeom prst="roundRect">
+            <a:avLst>
+              <a:gd name="adj" fmla="val 16667"/>
+            </a:avLst>
+          </a:prstGeom>
+          <a:solidFill>
+            <a:srgbClr val="1E293B"/>
+          </a:solidFill>
+          <a:ln w="19050">
+            <a:solidFill>
+              <a:srgbClr val="334155"/>
+            </a:solidFill>
+          </a:ln>
+        </p:spPr>
+        <p:txBody>
+          <a:bodyPr wrap="square" lIns="180000" tIns="180000" rIns="180000" bIns="180000">
+            <a:spAutoFit/>
+          </a:bodyPr>
+          <a:lstStyle/>
+          <a:p>
+            <a:pPr>
+              <a:defRPr sz="1400" b="1">
+                <a:solidFill>
+                  <a:srgbClr val="F87171"/>
+                </a:solidFill>
+                <a:latin typeface="Arial"/>
+              </a:defRPr>
+            </a:pPr>
+            <a:r>
+              <a:t>API Layer  →</a:t>
+            </a:r>
+          </a:p>
+          <a:p>
+            <a:pPr>
+              <a:spcBef>
+                <a:spcPts val="300"/>
+              </a:spcBef>
+              <a:defRPr sz="1200">
+                <a:solidFill>
+                  <a:srgbClr val="CBD5E1"/>
+                </a:solidFill>
+                <a:latin typeface="Arial"/>
+              </a:defRPr>
+            </a:pPr>
+            <a:r>
+              <a:t>• OrderController (REST)</a:t>
+            </a:r>
+          </a:p>
+          <a:p>
+            <a:pPr>
+              <a:spcBef>
+                <a:spcPts val="300"/>
+              </a:spcBef>
+              <a:defRPr sz="1200">
+                <a:solidFill>
+                  <a:srgbClr val="CBD5E1"/>
+                </a:solidFill>
+                <a:latin typeface="Arial"/>
+              </a:defRPr>
+            </a:pPr>
+            <a:r>
+              <a:t>• WorkflowController (signals/queries)</a:t>
+            </a:r>
+          </a:p>
+          <a:p>
+            <a:pPr>
+              <a:spcBef>
+                <a:spcPts val="300"/>
+              </a:spcBef>
+              <a:defRPr sz="1200">
+                <a:solidFill>
+                  <a:srgbClr val="CBD5E1"/>
+                </a:solidFill>
+                <a:latin typeface="Arial"/>
+              </a:defRPr>
+            </a:pPr>
+            <a:r>
+              <a:t>• GlobalExceptionHandler</a:t>
+            </a:r>
+          </a:p>
+          <a:p>
+            <a:pPr>
+              <a:spcBef>
+                <a:spcPts val="300"/>
+              </a:spcBef>
+              <a:defRPr sz="1200">
+                <a:solidFill>
+                  <a:srgbClr val="CBD5E1"/>
+                </a:solidFill>
+                <a:latin typeface="Arial"/>
+              </a:defRPr>
+            </a:pPr>
+            <a:r>
+              <a:t>  (RFC 7807 ProblemDetail)</a:t>
+            </a:r>
+          </a:p>
+          <a:p>
+            <a:pPr>
+              <a:spcBef>
+                <a:spcPts val="300"/>
+              </a:spcBef>
+              <a:defRPr sz="1200">
+                <a:solidFill>
+                  <a:srgbClr val="CBD5E1"/>
+                </a:solidFill>
+                <a:latin typeface="Arial"/>
+              </a:defRPr>
+            </a:pPr>
+            <a:r>
+              <a:t>• Bean Validation (@Valid)</a:t>
+            </a:r>
+          </a:p>
+          <a:p>
+            <a:pPr>
+              <a:spcBef>
+                <a:spcPts val="300"/>
+              </a:spcBef>
+              <a:defRPr sz="1200">
+                <a:solidFill>
+                  <a:srgbClr val="CBD5E1"/>
+                </a:solidFill>
+                <a:latin typeface="Arial"/>
+              </a:defRPr>
+            </a:pPr>
+            <a:r>
+              <a:t>• MapStruct DTOs (compile-time)</a:t>
+            </a:r>
+          </a:p>
+          <a:p>
+            <a:pPr>
+              <a:spcBef>
+                <a:spcPts val="300"/>
+              </a:spcBef>
+              <a:defRPr sz="1200">
+                <a:solidFill>
+                  <a:srgbClr val="CBD5E1"/>
+                </a:solidFill>
+                <a:latin typeface="Arial"/>
+              </a:defRPr>
+            </a:pPr>
+            <a:r>
+              <a:t>• Swagger / OpenAPI 3.0</a:t>
+            </a:r>
+          </a:p>
+          <a:p>
+            <a:pPr>
+              <a:spcBef>
+                <a:spcPts val="300"/>
+              </a:spcBef>
+              <a:defRPr sz="1200">
+                <a:solidFill>
+                  <a:srgbClr val="CBD5E1"/>
+                </a:solidFill>
+                <a:latin typeface="Arial"/>
+              </a:defRPr>
+            </a:pPr>
+            <a:r>
+              <a:t>• CorrelationIdFilter → MDC</a:t>
+            </a:r>
+          </a:p>
+        </p:txBody>
+      </p:sp>
+      <p:sp>
+        <p:nvSpPr>
+          <p:cNvPr id="4" name="Box 4"/>
+          <p:cNvSpPr/>
+          <p:nvPr/>
+        </p:nvSpPr>
+        <p:spPr>
+          <a:xfrm>
+            <a:off x="3263520" y="1750000"/>
+            <a:ext cx="2350000" cy="4700000"/>
+          </a:xfrm>
+          <a:prstGeom prst="roundRect">
+            <a:avLst>
+              <a:gd name="adj" fmla="val 16667"/>
+            </a:avLst>
+          </a:prstGeom>
+          <a:solidFill>
+            <a:srgbClr val="1E293B"/>
+          </a:solidFill>
+          <a:ln w="19050">
+            <a:solidFill>
+              <a:srgbClr val="334155"/>
+            </a:solidFill>
+          </a:ln>
+        </p:spPr>
+        <p:txBody>
+          <a:bodyPr wrap="square" lIns="180000" tIns="180000" rIns="180000" bIns="180000">
+            <a:spAutoFit/>
+          </a:bodyPr>
+          <a:lstStyle/>
+          <a:p>
+            <a:pPr>
+              <a:defRPr sz="1400" b="1">
+                <a:solidFill>
+                  <a:srgbClr val="86EFAC"/>
+                </a:solidFill>
+                <a:latin typeface="Arial"/>
+              </a:defRPr>
+            </a:pPr>
+            <a:r>
+              <a:t>Application Layer  →</a:t>
+            </a:r>
+          </a:p>
+          <a:p>
+            <a:pPr>
+              <a:spcBef>
+                <a:spcPts val="300"/>
+              </a:spcBef>
+              <a:defRPr sz="1200">
+                <a:solidFill>
+                  <a:srgbClr val="CBD5E1"/>
+                </a:solidFill>
+                <a:latin typeface="Arial"/>
+              </a:defRPr>
+            </a:pPr>
+            <a:r>
+              <a:t>• OrderCommandService</a:t>
+            </a:r>
+          </a:p>
+          <a:p>
+            <a:pPr>
+              <a:spcBef>
+                <a:spcPts val="300"/>
+              </a:spcBef>
+              <a:defRPr sz="1200">
+                <a:solidFill>
+                  <a:srgbClr val="CBD5E1"/>
+                </a:solidFill>
+                <a:latin typeface="Arial"/>
+              </a:defRPr>
+            </a:pPr>
+            <a:r>
+              <a:t>  @Transactional (all writes)</a:t>
+            </a:r>
+          </a:p>
+          <a:p>
+            <a:pPr>
+              <a:spcBef>
+                <a:spcPts val="300"/>
+              </a:spcBef>
+              <a:defRPr sz="1200">
+                <a:solidFill>
+                  <a:srgbClr val="CBD5E1"/>
+                </a:solidFill>
+                <a:latin typeface="Arial"/>
+              </a:defRPr>
+            </a:pPr>
+            <a:r>
+              <a:t>• OrderQueryService</a:t>
+            </a:r>
+          </a:p>
+          <a:p>
+            <a:pPr>
+              <a:spcBef>
+                <a:spcPts val="300"/>
+              </a:spcBef>
+              <a:defRPr sz="1200">
+                <a:solidFill>
+                  <a:srgbClr val="CBD5E1"/>
+                </a:solidFill>
+                <a:latin typeface="Arial"/>
+              </a:defRPr>
+            </a:pPr>
+            <a:r>
+              <a:t>  @Transactional(readOnly=true)</a:t>
+            </a:r>
+          </a:p>
+          <a:p>
+            <a:pPr>
+              <a:spcBef>
+                <a:spcPts val="300"/>
+              </a:spcBef>
+              <a:defRPr sz="1200">
+                <a:solidFill>
+                  <a:srgbClr val="CBD5E1"/>
+                </a:solidFill>
+                <a:latin typeface="Arial"/>
+              </a:defRPr>
+            </a:pPr>
+            <a:r>
+              <a:t>• CQRS: commands return void</a:t>
+            </a:r>
+          </a:p>
+          <a:p>
+            <a:pPr>
+              <a:spcBef>
+                <a:spcPts val="300"/>
+              </a:spcBef>
+              <a:defRPr sz="1200">
+                <a:solidFill>
+                  <a:srgbClr val="CBD5E1"/>
+                </a:solidFill>
+                <a:latin typeface="Arial"/>
+              </a:defRPr>
+            </a:pPr>
+            <a:r>
+              <a:t>  or new ID only — never state</a:t>
+            </a:r>
+          </a:p>
+          <a:p>
+            <a:pPr>
+              <a:spcBef>
+                <a:spcPts val="300"/>
+              </a:spcBef>
+              <a:defRPr sz="1200">
+                <a:solidFill>
+                  <a:srgbClr val="CBD5E1"/>
+                </a:solidFill>
+                <a:latin typeface="Arial"/>
+              </a:defRPr>
+            </a:pPr>
+            <a:r>
+              <a:t>• Queries never accept</a:t>
+            </a:r>
+          </a:p>
+          <a:p>
+            <a:pPr>
+              <a:spcBef>
+                <a:spcPts val="300"/>
+              </a:spcBef>
+              <a:defRPr sz="1200">
+                <a:solidFill>
+                  <a:srgbClr val="CBD5E1"/>
+                </a:solidFill>
+                <a:latin typeface="Arial"/>
+              </a:defRPr>
+            </a:pPr>
+            <a:r>
+              <a:t>  command objects</a:t>
+            </a:r>
+          </a:p>
+        </p:txBody>
+      </p:sp>
+      <p:sp>
+        <p:nvSpPr>
+          <p:cNvPr id="5" name="Box 5"/>
+          <p:cNvSpPr/>
+          <p:nvPr/>
+        </p:nvSpPr>
+        <p:spPr>
+          <a:xfrm>
+            <a:off x="5795520" y="1750000"/>
+            <a:ext cx="2350000" cy="4700000"/>
+          </a:xfrm>
+          <a:prstGeom prst="roundRect">
+            <a:avLst>
+              <a:gd name="adj" fmla="val 16667"/>
+            </a:avLst>
+          </a:prstGeom>
+          <a:solidFill>
+            <a:srgbClr val="1E293B"/>
+          </a:solidFill>
+          <a:ln w="19050">
+            <a:solidFill>
+              <a:srgbClr val="334155"/>
+            </a:solidFill>
+          </a:ln>
+        </p:spPr>
+        <p:txBody>
+          <a:bodyPr wrap="square" lIns="180000" tIns="180000" rIns="180000" bIns="180000">
+            <a:spAutoFit/>
+          </a:bodyPr>
+          <a:lstStyle/>
+          <a:p>
+            <a:pPr>
+              <a:defRPr sz="1400" b="1">
+                <a:solidFill>
+                  <a:srgbClr val="FDE68A"/>
+                </a:solidFill>
+                <a:latin typeface="Arial"/>
+              </a:defRPr>
+            </a:pPr>
+            <a:r>
+              <a:t>Domain Layer  ←  (core)</a:t>
+            </a:r>
+          </a:p>
+          <a:p>
+            <a:pPr>
+              <a:spcBef>
+                <a:spcPts val="300"/>
+              </a:spcBef>
+              <a:defRPr sz="1200">
+                <a:solidFill>
+                  <a:srgbClr val="CBD5E1"/>
+                </a:solidFill>
+                <a:latin typeface="Arial"/>
+              </a:defRPr>
+            </a:pPr>
+            <a:r>
+              <a:t>• Order aggregate (zero Spring)</a:t>
+            </a:r>
+          </a:p>
+          <a:p>
+            <a:pPr>
+              <a:spcBef>
+                <a:spcPts val="300"/>
+              </a:spcBef>
+              <a:defRPr sz="1200">
+                <a:solidFill>
+                  <a:srgbClr val="CBD5E1"/>
+                </a:solidFill>
+                <a:latin typeface="Arial"/>
+              </a:defRPr>
+            </a:pPr>
+            <a:r>
+              <a:t>• 13 sealed DomainEvents</a:t>
+            </a:r>
+          </a:p>
+          <a:p>
+            <a:pPr>
+              <a:spcBef>
+                <a:spcPts val="300"/>
+              </a:spcBef>
+              <a:defRPr sz="1200">
+                <a:solidFill>
+                  <a:srgbClr val="CBD5E1"/>
+                </a:solidFill>
+                <a:latin typeface="Arial"/>
+              </a:defRPr>
+            </a:pPr>
+            <a:r>
+              <a:t>• OrderId, CustomerId, Money,</a:t>
+            </a:r>
+          </a:p>
+          <a:p>
+            <a:pPr>
+              <a:spcBef>
+                <a:spcPts val="300"/>
+              </a:spcBef>
+              <a:defRPr sz="1200">
+                <a:solidFill>
+                  <a:srgbClr val="CBD5E1"/>
+                </a:solidFill>
+                <a:latin typeface="Arial"/>
+              </a:defRPr>
+            </a:pPr>
+            <a:r>
+              <a:t>  OrderItem value objects</a:t>
+            </a:r>
+          </a:p>
+          <a:p>
+            <a:pPr>
+              <a:spcBef>
+                <a:spcPts val="300"/>
+              </a:spcBef>
+              <a:defRPr sz="1200">
+                <a:solidFill>
+                  <a:srgbClr val="CBD5E1"/>
+                </a:solidFill>
+                <a:latin typeface="Arial"/>
+              </a:defRPr>
+            </a:pPr>
+            <a:r>
+              <a:t>• Outbound ports (interfaces):</a:t>
+            </a:r>
+          </a:p>
+          <a:p>
+            <a:pPr>
+              <a:spcBef>
+                <a:spcPts val="300"/>
+              </a:spcBef>
+              <a:defRPr sz="1200">
+                <a:solidFill>
+                  <a:srgbClr val="CBD5E1"/>
+                </a:solidFill>
+                <a:latin typeface="Arial"/>
+              </a:defRPr>
+            </a:pPr>
+            <a:r>
+              <a:t>  EventStore, SnapshotStore,</a:t>
+            </a:r>
+          </a:p>
+          <a:p>
+            <a:pPr>
+              <a:spcBef>
+                <a:spcPts val="300"/>
+              </a:spcBef>
+              <a:defRPr sz="1200">
+                <a:solidFill>
+                  <a:srgbClr val="CBD5E1"/>
+                </a:solidFill>
+                <a:latin typeface="Arial"/>
+              </a:defRPr>
+            </a:pPr>
+            <a:r>
+              <a:t>  OrderRepository, WorkflowPort</a:t>
+            </a:r>
+          </a:p>
+          <a:p>
+            <a:pPr>
+              <a:spcBef>
+                <a:spcPts val="300"/>
+              </a:spcBef>
+              <a:defRPr sz="1200">
+                <a:solidFill>
+                  <a:srgbClr val="CBD5E1"/>
+                </a:solidFill>
+                <a:latin typeface="Arial"/>
+              </a:defRPr>
+            </a:pPr>
+            <a:r>
+              <a:t>• Domain exceptions</a:t>
+            </a:r>
+          </a:p>
+        </p:txBody>
+      </p:sp>
+      <p:sp>
+        <p:nvSpPr>
+          <p:cNvPr id="6" name="Box 6"/>
+          <p:cNvSpPr/>
+          <p:nvPr/>
+        </p:nvSpPr>
+        <p:spPr>
+          <a:xfrm>
+            <a:off x="8327520" y="1750000"/>
+            <a:ext cx="2250000" cy="4700000"/>
+          </a:xfrm>
+          <a:prstGeom prst="roundRect">
+            <a:avLst>
+              <a:gd name="adj" fmla="val 16667"/>
+            </a:avLst>
+          </a:prstGeom>
+          <a:solidFill>
+            <a:srgbClr val="1E293B"/>
+          </a:solidFill>
+          <a:ln w="19050">
+            <a:solidFill>
+              <a:srgbClr val="334155"/>
+            </a:solidFill>
+          </a:ln>
+        </p:spPr>
+        <p:txBody>
+          <a:bodyPr wrap="square" lIns="180000" tIns="180000" rIns="180000" bIns="180000">
+            <a:spAutoFit/>
+          </a:bodyPr>
+          <a:lstStyle/>
+          <a:p>
+            <a:pPr>
+              <a:defRPr sz="1400" b="1">
+                <a:solidFill>
+                  <a:srgbClr val="C4B5FD"/>
+                </a:solidFill>
+                <a:latin typeface="Arial"/>
+              </a:defRPr>
+            </a:pPr>
+            <a:r>
+              <a:t>Infrastructure Layer</a:t>
+            </a:r>
+          </a:p>
+          <a:p>
+            <a:pPr>
+              <a:spcBef>
+                <a:spcPts val="300"/>
+              </a:spcBef>
+              <a:defRPr sz="1200">
+                <a:solidFill>
+                  <a:srgbClr val="CBD5E1"/>
+                </a:solidFill>
+                <a:latin typeface="Arial"/>
+              </a:defRPr>
+            </a:pPr>
+            <a:r>
+              <a:t>• EventStoreAdapter (JDBC)</a:t>
+            </a:r>
+          </a:p>
+          <a:p>
+            <a:pPr>
+              <a:spcBef>
+                <a:spcPts val="300"/>
+              </a:spcBef>
+              <a:defRPr sz="1200">
+                <a:solidFill>
+                  <a:srgbClr val="CBD5E1"/>
+                </a:solidFill>
+                <a:latin typeface="Arial"/>
+              </a:defRPr>
+            </a:pPr>
+            <a:r>
+              <a:t>• SnapshotStoreAdapter</a:t>
+            </a:r>
+          </a:p>
+          <a:p>
+            <a:pPr>
+              <a:spcBef>
+                <a:spcPts val="300"/>
+              </a:spcBef>
+              <a:defRPr sz="1200">
+                <a:solidFill>
+                  <a:srgbClr val="CBD5E1"/>
+                </a:solidFill>
+                <a:latin typeface="Arial"/>
+              </a:defRPr>
+            </a:pPr>
+            <a:r>
+              <a:t>• OrderRepositoryAdapter</a:t>
+            </a:r>
+          </a:p>
+          <a:p>
+            <a:pPr>
+              <a:spcBef>
+                <a:spcPts val="300"/>
+              </a:spcBef>
+              <a:defRPr sz="1200">
+                <a:solidFill>
+                  <a:srgbClr val="CBD5E1"/>
+                </a:solidFill>
+                <a:latin typeface="Arial"/>
+              </a:defRPr>
+            </a:pPr>
+            <a:r>
+              <a:t>• WorkflowPortAdapter (Temporal)</a:t>
+            </a:r>
+          </a:p>
+          <a:p>
+            <a:pPr>
+              <a:spcBef>
+                <a:spcPts val="300"/>
+              </a:spcBef>
+              <a:defRPr sz="1200">
+                <a:solidFill>
+                  <a:srgbClr val="CBD5E1"/>
+                </a:solidFill>
+                <a:latin typeface="Arial"/>
+              </a:defRPr>
+            </a:pPr>
+            <a:r>
+              <a:t>• InventoryActivityImpl (HTTP)</a:t>
+            </a:r>
+          </a:p>
+          <a:p>
+            <a:pPr>
+              <a:spcBef>
+                <a:spcPts val="300"/>
+              </a:spcBef>
+              <a:defRPr sz="1200">
+                <a:solidFill>
+                  <a:srgbClr val="CBD5E1"/>
+                </a:solidFill>
+                <a:latin typeface="Arial"/>
+              </a:defRPr>
+            </a:pPr>
+            <a:r>
+              <a:t>• PaymentActivityImpl (HTTP)</a:t>
+            </a:r>
+          </a:p>
+          <a:p>
+            <a:pPr>
+              <a:spcBef>
+                <a:spcPts val="300"/>
+              </a:spcBef>
+              <a:defRPr sz="1200">
+                <a:solidFill>
+                  <a:srgbClr val="CBD5E1"/>
+                </a:solidFill>
+                <a:latin typeface="Arial"/>
+              </a:defRPr>
+            </a:pPr>
+            <a:r>
+              <a:t>• ShippingActivityImpl (HTTP)</a:t>
+            </a:r>
+          </a:p>
+          <a:p>
+            <a:pPr>
+              <a:spcBef>
+                <a:spcPts val="300"/>
+              </a:spcBef>
+              <a:defRPr sz="1200">
+                <a:solidFill>
+                  <a:srgbClr val="CBD5E1"/>
+                </a:solidFill>
+                <a:latin typeface="Arial"/>
+              </a:defRPr>
+            </a:pPr>
+            <a:r>
+              <a:t>• OrderEventKafkaPublisher</a:t>
+            </a:r>
+          </a:p>
+        </p:txBody>
+      </p:sp>
+    </p:spTree>
+  </p:cSld>
+  <p:clrMapOvr>
+    <a:masterClrMapping/>
+  </p:clrMapOvr>
+</p:sld>
+</file>
+
+<file path=ppt/slides/slide12.xml><?xml version="1.0" encoding="utf-8"?>
+<p:sld xmlns:a="http://schemas.openxmlformats.org/drawingml/2006/main" xmlns:p="http://schemas.openxmlformats.org/presentationml/2006/main" xmlns:r="http://schemas.openxmlformats.org/officeDocument/2006/relationships">
+  <p:cSld>
+    <p:bg>
+      <p:bgPr>
+        <a:solidFill>
+          <a:srgbClr val="0F172A"/>
+        </a:solidFill>
+        <a:effectLst/>
+      </p:bgPr>
+    </p:bg>
+    <p:spTree>
+      <p:nvGrpSpPr>
+        <p:cNvPr id="1" name=""/>
+        <p:cNvGrpSpPr/>
+        <p:nvPr/>
+      </p:nvGrpSpPr>
+      <p:grpSpPr/>
+      <p:sp>
+        <p:nvSpPr>
+          <p:cNvPr id="100" name="Accent"/>
+          <p:cNvSpPr/>
+          <p:nvPr/>
+        </p:nvSpPr>
+        <p:spPr>
+          <a:xfrm>
+            <a:off x="0" y="0"/>
+            <a:ext cx="365760" cy="6858000"/>
+          </a:xfrm>
+          <a:prstGeom prst="rect">
+            <a:avLst/>
+          </a:prstGeom>
+          <a:solidFill>
+            <a:srgbClr val="6366F1"/>
+          </a:solidFill>
+          <a:ln>
+            <a:solidFill>
+              <a:srgbClr val="6366F1"/>
+            </a:solidFill>
+          </a:ln>
+        </p:spPr>
+        <p:style>
+          <a:lnRef idx="1">
+            <a:schemeClr val="accent1"/>
+          </a:lnRef>
+          <a:fillRef idx="3">
+            <a:schemeClr val="accent1"/>
+          </a:fillRef>
+          <a:effectRef idx="2">
+            <a:schemeClr val="accent1"/>
+          </a:effectRef>
+          <a:fontRef idx="minor">
+            <a:schemeClr val="lt1"/>
+          </a:fontRef>
+        </p:style>
+        <p:txBody>
+          <a:bodyPr rtlCol="0" anchor="ctr"/>
+          <a:lstStyle/>
+          <a:p>
+            <a:pPr algn="ctr"/>
+          </a:p>
+        </p:txBody>
+      </p:sp>
+      <p:sp>
+        <p:nvSpPr>
+          <p:cNvPr id="2" name="Title"/>
+          <p:cNvSpPr txBox="1"/>
+          <p:nvPr/>
+        </p:nvSpPr>
+        <p:spPr>
+          <a:xfrm>
+            <a:off x="731520" y="548640"/>
+            <a:ext cx="10698480" cy="1100000"/>
+          </a:xfrm>
+          <a:prstGeom prst="rect">
+            <a:avLst/>
+          </a:prstGeom>
+          <a:noFill/>
+        </p:spPr>
+        <p:txBody>
+          <a:bodyPr wrap="square" lIns="0" tIns="0" rIns="0" bIns="0">
+            <a:spAutoFit/>
+          </a:bodyPr>
+          <a:lstStyle/>
+          <a:p>
+            <a:pPr>
+              <a:defRPr sz="3600" b="1">
+                <a:solidFill>
+                  <a:srgbClr val="F8FAFC"/>
+                </a:solidFill>
+                <a:latin typeface="Arial"/>
+              </a:defRPr>
+            </a:pPr>
+            <a:r>
+              <a:t>Full System Architecture</a:t>
+            </a:r>
+          </a:p>
+          <a:p>
+            <a:pPr>
+              <a:spcBef>
+                <a:spcPts val="800"/>
+              </a:spcBef>
+              <a:defRPr sz="1800">
+                <a:solidFill>
+                  <a:srgbClr val="14B8A6"/>
+                </a:solidFill>
+                <a:latin typeface="Arial"/>
+              </a:defRPr>
+            </a:pPr>
+            <a:r>
+              <a:t>5 microservices · Kong API Gateway · Kafka event streaming · Temporal orchestration · 6 isolated databases</a:t>
+            </a:r>
+          </a:p>
+        </p:txBody>
+      </p:sp>
+      <p:sp>
+        <p:nvSpPr>
+          <p:cNvPr id="3" name="Box 3"/>
+          <p:cNvSpPr/>
+          <p:nvPr/>
+        </p:nvSpPr>
+        <p:spPr>
+          <a:xfrm>
+            <a:off x="731520" y="1750000"/>
+            <a:ext cx="1700000" cy="4700000"/>
+          </a:xfrm>
+          <a:prstGeom prst="roundRect">
+            <a:avLst>
+              <a:gd name="adj" fmla="val 16667"/>
+            </a:avLst>
+          </a:prstGeom>
+          <a:solidFill>
+            <a:srgbClr val="0F3460"/>
+          </a:solidFill>
+          <a:ln w="19050">
+            <a:solidFill>
+              <a:srgbClr val="334155"/>
+            </a:solidFill>
+          </a:ln>
+        </p:spPr>
+        <p:txBody>
+          <a:bodyPr wrap="square" lIns="180000" tIns="180000" rIns="180000" bIns="180000">
+            <a:spAutoFit/>
+          </a:bodyPr>
+          <a:lstStyle/>
+          <a:p>
+            <a:pPr>
+              <a:defRPr sz="1400" b="1">
+                <a:solidFill>
+                  <a:srgbClr val="7DD3FC"/>
+                </a:solidFill>
+                <a:latin typeface="Arial"/>
+              </a:defRPr>
+            </a:pPr>
+            <a:r>
+              <a:t>Kong Gateway  :8000</a:t>
+            </a:r>
+          </a:p>
+          <a:p>
+            <a:pPr>
+              <a:spcBef>
+                <a:spcPts val="300"/>
+              </a:spcBef>
+              <a:defRPr sz="1200">
+                <a:solidFill>
+                  <a:srgbClr val="CBD5E1"/>
+                </a:solidFill>
+                <a:latin typeface="Arial"/>
+              </a:defRPr>
+            </a:pPr>
+            <a:r>
+              <a:t>• Proxy entry point for all</a:t>
+            </a:r>
+          </a:p>
+          <a:p>
+            <a:pPr>
+              <a:spcBef>
+                <a:spcPts val="300"/>
+              </a:spcBef>
+              <a:defRPr sz="1200">
+                <a:solidFill>
+                  <a:srgbClr val="CBD5E1"/>
+                </a:solidFill>
+                <a:latin typeface="Arial"/>
+              </a:defRPr>
+            </a:pPr>
+            <a:r>
+              <a:t>  client traffic</a:t>
+            </a:r>
+          </a:p>
+          <a:p>
+            <a:pPr>
+              <a:spcBef>
+                <a:spcPts val="300"/>
+              </a:spcBef>
+              <a:defRPr sz="1200">
+                <a:solidFill>
+                  <a:srgbClr val="CBD5E1"/>
+                </a:solidFill>
+                <a:latin typeface="Arial"/>
+              </a:defRPr>
+            </a:pPr>
+            <a:r>
+              <a:t>• Rate limiting (100 req/min)</a:t>
+            </a:r>
+          </a:p>
+          <a:p>
+            <a:pPr>
+              <a:spcBef>
+                <a:spcPts val="300"/>
+              </a:spcBef>
+              <a:defRPr sz="1200">
+                <a:solidFill>
+                  <a:srgbClr val="CBD5E1"/>
+                </a:solidFill>
+                <a:latin typeface="Arial"/>
+              </a:defRPr>
+            </a:pPr>
+            <a:r>
+              <a:t>• Proxy cache (GET 60s)</a:t>
+            </a:r>
+          </a:p>
+          <a:p>
+            <a:pPr>
+              <a:spcBef>
+                <a:spcPts val="300"/>
+              </a:spcBef>
+              <a:defRPr sz="1200">
+                <a:solidFill>
+                  <a:srgbClr val="CBD5E1"/>
+                </a:solidFill>
+                <a:latin typeface="Arial"/>
+              </a:defRPr>
+            </a:pPr>
+            <a:r>
+              <a:t>• correlation-id plugin</a:t>
+            </a:r>
+          </a:p>
+          <a:p>
+            <a:pPr>
+              <a:spcBef>
+                <a:spcPts val="300"/>
+              </a:spcBef>
+              <a:defRPr sz="1200">
+                <a:solidFill>
+                  <a:srgbClr val="CBD5E1"/>
+                </a:solidFill>
+                <a:latin typeface="Arial"/>
+              </a:defRPr>
+            </a:pPr>
+            <a:r>
+              <a:t>• prometheus /metrics</a:t>
+            </a:r>
+          </a:p>
+          <a:p>
+            <a:pPr>
+              <a:spcBef>
+                <a:spcPts val="300"/>
+              </a:spcBef>
+              <a:defRPr sz="1200">
+                <a:solidFill>
+                  <a:srgbClr val="CBD5E1"/>
+                </a:solidFill>
+                <a:latin typeface="Arial"/>
+              </a:defRPr>
+            </a:pPr>
+            <a:r>
+              <a:t>• Routes: /orders/* /workflows/*</a:t>
+            </a:r>
+          </a:p>
+          <a:p>
+            <a:pPr>
+              <a:spcBef>
+                <a:spcPts val="300"/>
+              </a:spcBef>
+              <a:defRPr sz="1200">
+                <a:solidFill>
+                  <a:srgbClr val="CBD5E1"/>
+                </a:solidFill>
+                <a:latin typeface="Arial"/>
+              </a:defRPr>
+            </a:pPr>
+            <a:r>
+              <a:t>  /inventory/* /payments/*</a:t>
+            </a:r>
+          </a:p>
+          <a:p>
+            <a:pPr>
+              <a:spcBef>
+                <a:spcPts val="300"/>
+              </a:spcBef>
+              <a:defRPr sz="1200">
+                <a:solidFill>
+                  <a:srgbClr val="CBD5E1"/>
+                </a:solidFill>
+                <a:latin typeface="Arial"/>
+              </a:defRPr>
+            </a:pPr>
+            <a:r>
+              <a:t>  /shipping/*</a:t>
+            </a:r>
+          </a:p>
+        </p:txBody>
+      </p:sp>
+      <p:sp>
+        <p:nvSpPr>
+          <p:cNvPr id="4" name="Box 4"/>
+          <p:cNvSpPr/>
+          <p:nvPr/>
+        </p:nvSpPr>
+        <p:spPr>
+          <a:xfrm>
+            <a:off x="2613520" y="1750000"/>
+            <a:ext cx="2400000" cy="4700000"/>
+          </a:xfrm>
+          <a:prstGeom prst="roundRect">
+            <a:avLst>
+              <a:gd name="adj" fmla="val 16667"/>
+            </a:avLst>
+          </a:prstGeom>
+          <a:solidFill>
+            <a:srgbClr val="0D2B1E"/>
+          </a:solidFill>
+          <a:ln w="19050">
+            <a:solidFill>
+              <a:srgbClr val="334155"/>
+            </a:solidFill>
+          </a:ln>
+        </p:spPr>
+        <p:txBody>
+          <a:bodyPr wrap="square" lIns="180000" tIns="180000" rIns="180000" bIns="180000">
+            <a:spAutoFit/>
+          </a:bodyPr>
+          <a:lstStyle/>
+          <a:p>
+            <a:pPr>
+              <a:defRPr sz="1400" b="1">
+                <a:solidFill>
+                  <a:srgbClr val="86EFAC"/>
+                </a:solidFill>
+                <a:latin typeface="Arial"/>
+              </a:defRPr>
+            </a:pPr>
+            <a:r>
+              <a:t>Microservices</a:t>
+            </a:r>
+          </a:p>
+          <a:p>
+            <a:pPr>
+              <a:spcBef>
+                <a:spcPts val="300"/>
+              </a:spcBef>
+              <a:defRPr sz="1200">
+                <a:solidFill>
+                  <a:srgbClr val="CBD5E1"/>
+                </a:solidFill>
+                <a:latin typeface="Arial"/>
+              </a:defRPr>
+            </a:pPr>
+            <a:r>
+              <a:t>📦 order-service   :8080</a:t>
+            </a:r>
+          </a:p>
+          <a:p>
+            <a:pPr>
+              <a:spcBef>
+                <a:spcPts val="300"/>
+              </a:spcBef>
+              <a:defRPr sz="1200">
+                <a:solidFill>
+                  <a:srgbClr val="CBD5E1"/>
+                </a:solidFill>
+                <a:latin typeface="Arial"/>
+              </a:defRPr>
+            </a:pPr>
+            <a:r>
+              <a:t>   REST + Temporal Worker</a:t>
+            </a:r>
+          </a:p>
+          <a:p>
+            <a:pPr>
+              <a:spcBef>
+                <a:spcPts val="300"/>
+              </a:spcBef>
+              <a:defRPr sz="1200">
+                <a:solidFill>
+                  <a:srgbClr val="CBD5E1"/>
+                </a:solidFill>
+                <a:latin typeface="Arial"/>
+              </a:defRPr>
+            </a:pPr>
+            <a:r>
+              <a:t>   Event Sourcing + CQRS</a:t>
+            </a:r>
+          </a:p>
+          <a:p>
+            <a:pPr>
+              <a:spcBef>
+                <a:spcPts val="300"/>
+              </a:spcBef>
+              <a:defRPr sz="1200">
+                <a:solidFill>
+                  <a:srgbClr val="CBD5E1"/>
+                </a:solidFill>
+                <a:latin typeface="Arial"/>
+              </a:defRPr>
+            </a:pPr>
+            <a:r>
+              <a:t>   Kafka producer (order.events)</a:t>
+            </a:r>
+          </a:p>
+          <a:p>
+            <a:pPr>
+              <a:spcBef>
+                <a:spcPts val="300"/>
+              </a:spcBef>
+              <a:defRPr sz="1200">
+                <a:solidFill>
+                  <a:srgbClr val="CBD5E1"/>
+                </a:solidFill>
+                <a:latin typeface="Arial"/>
+              </a:defRPr>
+            </a:pPr>
+            <a:r>
+              <a:t>🏭 inventory-service :8081</a:t>
+            </a:r>
+          </a:p>
+          <a:p>
+            <a:pPr>
+              <a:spcBef>
+                <a:spcPts val="300"/>
+              </a:spcBef>
+              <a:defRPr sz="1200">
+                <a:solidFill>
+                  <a:srgbClr val="CBD5E1"/>
+                </a:solidFill>
+                <a:latin typeface="Arial"/>
+              </a:defRPr>
+            </a:pPr>
+            <a:r>
+              <a:t>💳 payment-service   :8082</a:t>
+            </a:r>
+          </a:p>
+          <a:p>
+            <a:pPr>
+              <a:spcBef>
+                <a:spcPts val="300"/>
+              </a:spcBef>
+              <a:defRPr sz="1200">
+                <a:solidFill>
+                  <a:srgbClr val="CBD5E1"/>
+                </a:solidFill>
+                <a:latin typeface="Arial"/>
+              </a:defRPr>
+            </a:pPr>
+            <a:r>
+              <a:t>   InsufficientFunds (non-retry)</a:t>
+            </a:r>
+          </a:p>
+          <a:p>
+            <a:pPr>
+              <a:spcBef>
+                <a:spcPts val="300"/>
+              </a:spcBef>
+              <a:defRPr sz="1200">
+                <a:solidFill>
+                  <a:srgbClr val="CBD5E1"/>
+                </a:solidFill>
+                <a:latin typeface="Arial"/>
+              </a:defRPr>
+            </a:pPr>
+            <a:r>
+              <a:t>   CardDeclined (non-retry)</a:t>
+            </a:r>
+          </a:p>
+          <a:p>
+            <a:pPr>
+              <a:spcBef>
+                <a:spcPts val="300"/>
+              </a:spcBef>
+              <a:defRPr sz="1200">
+                <a:solidFill>
+                  <a:srgbClr val="CBD5E1"/>
+                </a:solidFill>
+                <a:latin typeface="Arial"/>
+              </a:defRPr>
+            </a:pPr>
+            <a:r>
+              <a:t>🚚 shipping-service  :8083</a:t>
+            </a:r>
+          </a:p>
+          <a:p>
+            <a:pPr>
+              <a:spcBef>
+                <a:spcPts val="300"/>
+              </a:spcBef>
+              <a:defRPr sz="1200">
+                <a:solidFill>
+                  <a:srgbClr val="CBD5E1"/>
+                </a:solidFill>
+                <a:latin typeface="Arial"/>
+              </a:defRPr>
+            </a:pPr>
+            <a:r>
+              <a:t>🔔 notification-svc  :8084</a:t>
+            </a:r>
+          </a:p>
+          <a:p>
+            <a:pPr>
+              <a:spcBef>
+                <a:spcPts val="300"/>
+              </a:spcBef>
+              <a:defRPr sz="1200">
+                <a:solidFill>
+                  <a:srgbClr val="CBD5E1"/>
+                </a:solidFill>
+                <a:latin typeface="Arial"/>
+              </a:defRPr>
+            </a:pPr>
+            <a:r>
+              <a:t>   Pure Kafka consumer</a:t>
+            </a:r>
+          </a:p>
+        </p:txBody>
+      </p:sp>
+      <p:sp>
+        <p:nvSpPr>
+          <p:cNvPr id="5" name="Box 5"/>
+          <p:cNvSpPr/>
+          <p:nvPr/>
+        </p:nvSpPr>
+        <p:spPr>
+          <a:xfrm>
+            <a:off x="5195520" y="1750000"/>
+            <a:ext cx="1800000" cy="4700000"/>
+          </a:xfrm>
+          <a:prstGeom prst="roundRect">
+            <a:avLst>
+              <a:gd name="adj" fmla="val 16667"/>
+            </a:avLst>
+          </a:prstGeom>
+          <a:solidFill>
+            <a:srgbClr val="1E0A3C"/>
+          </a:solidFill>
+          <a:ln w="19050">
+            <a:solidFill>
+              <a:srgbClr val="334155"/>
+            </a:solidFill>
+          </a:ln>
+        </p:spPr>
+        <p:txBody>
+          <a:bodyPr wrap="square" lIns="180000" tIns="180000" rIns="180000" bIns="180000">
+            <a:spAutoFit/>
+          </a:bodyPr>
+          <a:lstStyle/>
+          <a:p>
+            <a:pPr>
+              <a:defRPr sz="1400" b="1">
+                <a:solidFill>
+                  <a:srgbClr val="D8B4FE"/>
+                </a:solidFill>
+                <a:latin typeface="Arial"/>
+              </a:defRPr>
+            </a:pPr>
+            <a:r>
+              <a:t>Kafka  :9092</a:t>
+            </a:r>
+          </a:p>
+          <a:p>
+            <a:pPr>
+              <a:spcBef>
+                <a:spcPts val="300"/>
+              </a:spcBef>
+              <a:defRPr sz="1200">
+                <a:solidFill>
+                  <a:srgbClr val="CBD5E1"/>
+                </a:solidFill>
+                <a:latin typeface="Arial"/>
+              </a:defRPr>
+            </a:pPr>
+            <a:r>
+              <a:t>Topics:</a:t>
+            </a:r>
+          </a:p>
+          <a:p>
+            <a:pPr>
+              <a:spcBef>
+                <a:spcPts val="300"/>
+              </a:spcBef>
+              <a:defRPr sz="1200">
+                <a:solidFill>
+                  <a:srgbClr val="CBD5E1"/>
+                </a:solidFill>
+                <a:latin typeface="Arial"/>
+              </a:defRPr>
+            </a:pPr>
+            <a:r>
+              <a:t>  order.events</a:t>
+            </a:r>
+          </a:p>
+          <a:p>
+            <a:pPr>
+              <a:spcBef>
+                <a:spcPts val="300"/>
+              </a:spcBef>
+              <a:defRPr sz="1200">
+                <a:solidFill>
+                  <a:srgbClr val="CBD5E1"/>
+                </a:solidFill>
+                <a:latin typeface="Arial"/>
+              </a:defRPr>
+            </a:pPr>
+            <a:r>
+              <a:t>  inventory.events</a:t>
+            </a:r>
+          </a:p>
+          <a:p>
+            <a:pPr>
+              <a:spcBef>
+                <a:spcPts val="300"/>
+              </a:spcBef>
+              <a:defRPr sz="1200">
+                <a:solidFill>
+                  <a:srgbClr val="CBD5E1"/>
+                </a:solidFill>
+                <a:latin typeface="Arial"/>
+              </a:defRPr>
+            </a:pPr>
+            <a:r>
+              <a:t>  payment.events</a:t>
+            </a:r>
+          </a:p>
+          <a:p>
+            <a:pPr>
+              <a:spcBef>
+                <a:spcPts val="300"/>
+              </a:spcBef>
+              <a:defRPr sz="1200">
+                <a:solidFill>
+                  <a:srgbClr val="CBD5E1"/>
+                </a:solidFill>
+                <a:latin typeface="Arial"/>
+              </a:defRPr>
+            </a:pPr>
+            <a:r>
+              <a:t>  shipping.events</a:t>
+            </a:r>
+          </a:p>
+          <a:p>
+            <a:pPr>
+              <a:spcBef>
+                <a:spcPts val="300"/>
+              </a:spcBef>
+              <a:defRPr sz="1200">
+                <a:solidFill>
+                  <a:srgbClr val="CBD5E1"/>
+                </a:solidFill>
+                <a:latin typeface="Arial"/>
+              </a:defRPr>
+            </a:pPr>
+            <a:r>
+              <a:t>  notification.requests</a:t>
+            </a:r>
+          </a:p>
+          <a:p>
+            <a:pPr>
+              <a:spcBef>
+                <a:spcPts val="300"/>
+              </a:spcBef>
+              <a:defRPr sz="1200">
+                <a:solidFill>
+                  <a:srgbClr val="CBD5E1"/>
+                </a:solidFill>
+                <a:latin typeface="Arial"/>
+              </a:defRPr>
+            </a:pPr>
+            <a:r>
+              <a:t>Key = orderId</a:t>
+            </a:r>
+          </a:p>
+          <a:p>
+            <a:pPr>
+              <a:spcBef>
+                <a:spcPts val="300"/>
+              </a:spcBef>
+              <a:defRPr sz="1200">
+                <a:solidFill>
+                  <a:srgbClr val="CBD5E1"/>
+                </a:solidFill>
+                <a:latin typeface="Arial"/>
+              </a:defRPr>
+            </a:pPr>
+            <a:r>
+              <a:t>(ordered per partition)</a:t>
+            </a:r>
+          </a:p>
+          <a:p>
+            <a:pPr>
+              <a:spcBef>
+                <a:spcPts val="300"/>
+              </a:spcBef>
+              <a:defRPr sz="1200">
+                <a:solidFill>
+                  <a:srgbClr val="CBD5E1"/>
+                </a:solidFill>
+                <a:latin typeface="Arial"/>
+              </a:defRPr>
+            </a:pPr>
+            <a:r>
+              <a:t>Outbox Pattern:</a:t>
+            </a:r>
+          </a:p>
+          <a:p>
+            <a:pPr>
+              <a:spcBef>
+                <a:spcPts val="300"/>
+              </a:spcBef>
+              <a:defRPr sz="1200">
+                <a:solidFill>
+                  <a:srgbClr val="CBD5E1"/>
+                </a:solidFill>
+                <a:latin typeface="Arial"/>
+              </a:defRPr>
+            </a:pPr>
+            <a:r>
+              <a:t>DB commit → AFTER_COMMIT</a:t>
+            </a:r>
+          </a:p>
+          <a:p>
+            <a:pPr>
+              <a:spcBef>
+                <a:spcPts val="300"/>
+              </a:spcBef>
+              <a:defRPr sz="1200">
+                <a:solidFill>
+                  <a:srgbClr val="CBD5E1"/>
+                </a:solidFill>
+                <a:latin typeface="Arial"/>
+              </a:defRPr>
+            </a:pPr>
+            <a:r>
+              <a:t>→ Kafka publish</a:t>
+            </a:r>
+          </a:p>
+        </p:txBody>
+      </p:sp>
+      <p:sp>
+        <p:nvSpPr>
+          <p:cNvPr id="6" name="Box 6"/>
+          <p:cNvSpPr/>
+          <p:nvPr/>
+        </p:nvSpPr>
+        <p:spPr>
+          <a:xfrm>
+            <a:off x="7177520" y="1750000"/>
+            <a:ext cx="1700000" cy="4700000"/>
+          </a:xfrm>
+          <a:prstGeom prst="roundRect">
+            <a:avLst>
+              <a:gd name="adj" fmla="val 16667"/>
+            </a:avLst>
+          </a:prstGeom>
+          <a:solidFill>
+            <a:srgbClr val="1C1000"/>
+          </a:solidFill>
+          <a:ln w="19050">
+            <a:solidFill>
+              <a:srgbClr val="334155"/>
+            </a:solidFill>
+          </a:ln>
+        </p:spPr>
+        <p:txBody>
+          <a:bodyPr wrap="square" lIns="180000" tIns="180000" rIns="180000" bIns="180000">
+            <a:spAutoFit/>
+          </a:bodyPr>
+          <a:lstStyle/>
+          <a:p>
+            <a:pPr>
+              <a:defRPr sz="1400" b="1">
+                <a:solidFill>
+                  <a:srgbClr val="FED7AA"/>
+                </a:solidFill>
+                <a:latin typeface="Arial"/>
+              </a:defRPr>
+            </a:pPr>
+            <a:r>
+              <a:t>Temporal  :7233</a:t>
+            </a:r>
+          </a:p>
+          <a:p>
+            <a:pPr>
+              <a:spcBef>
+                <a:spcPts val="300"/>
+              </a:spcBef>
+              <a:defRPr sz="1200">
+                <a:solidFill>
+                  <a:srgbClr val="CBD5E1"/>
+                </a:solidFill>
+                <a:latin typeface="Arial"/>
+              </a:defRPr>
+            </a:pPr>
+            <a:r>
+              <a:t>gRPC endpoint</a:t>
+            </a:r>
+          </a:p>
+          <a:p>
+            <a:pPr>
+              <a:spcBef>
+                <a:spcPts val="300"/>
+              </a:spcBef>
+              <a:defRPr sz="1200">
+                <a:solidFill>
+                  <a:srgbClr val="CBD5E1"/>
+                </a:solidFill>
+                <a:latin typeface="Arial"/>
+              </a:defRPr>
+            </a:pPr>
+            <a:r>
+              <a:t>Workflow history DB :5433</a:t>
+            </a:r>
+          </a:p>
+          <a:p>
+            <a:pPr>
+              <a:spcBef>
+                <a:spcPts val="300"/>
+              </a:spcBef>
+              <a:defRPr sz="1200">
+                <a:solidFill>
+                  <a:srgbClr val="CBD5E1"/>
+                </a:solidFill>
+                <a:latin typeface="Arial"/>
+              </a:defRPr>
+            </a:pPr>
+            <a:r>
+              <a:t>Temporal UI :8088</a:t>
+            </a:r>
+          </a:p>
+          <a:p>
+            <a:pPr>
+              <a:spcBef>
+                <a:spcPts val="300"/>
+              </a:spcBef>
+              <a:defRPr sz="1200">
+                <a:solidFill>
+                  <a:srgbClr val="CBD5E1"/>
+                </a:solidFill>
+                <a:latin typeface="Arial"/>
+              </a:defRPr>
+            </a:pPr>
+            <a:r>
+              <a:t/>
+            </a:r>
+          </a:p>
+          <a:p>
+            <a:pPr>
+              <a:spcBef>
+                <a:spcPts val="300"/>
+              </a:spcBef>
+              <a:defRPr sz="1200">
+                <a:solidFill>
+                  <a:srgbClr val="CBD5E1"/>
+                </a:solidFill>
+                <a:latin typeface="Arial"/>
+              </a:defRPr>
+            </a:pPr>
+            <a:r>
+              <a:t>Worker polls task queue:</a:t>
+            </a:r>
+          </a:p>
+          <a:p>
+            <a:pPr>
+              <a:spcBef>
+                <a:spcPts val="300"/>
+              </a:spcBef>
+              <a:defRPr sz="1200">
+                <a:solidFill>
+                  <a:srgbClr val="CBD5E1"/>
+                </a:solidFill>
+                <a:latin typeface="Arial"/>
+              </a:defRPr>
+            </a:pPr>
+            <a:r>
+              <a:t>ORDER_FULFILLMENT_QUEUE</a:t>
+            </a:r>
+          </a:p>
+          <a:p>
+            <a:pPr>
+              <a:spcBef>
+                <a:spcPts val="300"/>
+              </a:spcBef>
+              <a:defRPr sz="1200">
+                <a:solidFill>
+                  <a:srgbClr val="CBD5E1"/>
+                </a:solidFill>
+                <a:latin typeface="Arial"/>
+              </a:defRPr>
+            </a:pPr>
+            <a:r>
+              <a:t/>
+            </a:r>
+          </a:p>
+          <a:p>
+            <a:pPr>
+              <a:spcBef>
+                <a:spcPts val="300"/>
+              </a:spcBef>
+              <a:defRPr sz="1200">
+                <a:solidFill>
+                  <a:srgbClr val="CBD5E1"/>
+                </a:solidFill>
+                <a:latin typeface="Arial"/>
+              </a:defRPr>
+            </a:pPr>
+            <a:r>
+              <a:t>Signals:</a:t>
+            </a:r>
+          </a:p>
+          <a:p>
+            <a:pPr>
+              <a:spcBef>
+                <a:spcPts val="300"/>
+              </a:spcBef>
+              <a:defRPr sz="1200">
+                <a:solidFill>
+                  <a:srgbClr val="CBD5E1"/>
+                </a:solidFill>
+                <a:latin typeface="Arial"/>
+              </a:defRPr>
+            </a:pPr>
+            <a:r>
+              <a:t>  cancelOrder(reason)</a:t>
+            </a:r>
+          </a:p>
+          <a:p>
+            <a:pPr>
+              <a:spcBef>
+                <a:spcPts val="300"/>
+              </a:spcBef>
+              <a:defRPr sz="1200">
+                <a:solidFill>
+                  <a:srgbClr val="CBD5E1"/>
+                </a:solidFill>
+                <a:latin typeface="Arial"/>
+              </a:defRPr>
+            </a:pPr>
+            <a:r>
+              <a:t>  retryPayment()</a:t>
+            </a:r>
+          </a:p>
+          <a:p>
+            <a:pPr>
+              <a:spcBef>
+                <a:spcPts val="300"/>
+              </a:spcBef>
+              <a:defRPr sz="1200">
+                <a:solidFill>
+                  <a:srgbClr val="CBD5E1"/>
+                </a:solidFill>
+                <a:latin typeface="Arial"/>
+              </a:defRPr>
+            </a:pPr>
+            <a:r>
+              <a:t>Queries:</a:t>
+            </a:r>
+          </a:p>
+          <a:p>
+            <a:pPr>
+              <a:spcBef>
+                <a:spcPts val="300"/>
+              </a:spcBef>
+              <a:defRPr sz="1200">
+                <a:solidFill>
+                  <a:srgbClr val="CBD5E1"/>
+                </a:solidFill>
+                <a:latin typeface="Arial"/>
+              </a:defRPr>
+            </a:pPr>
+            <a:r>
+              <a:t>  getCurrentStatus()</a:t>
+            </a:r>
+          </a:p>
+          <a:p>
+            <a:pPr>
+              <a:spcBef>
+                <a:spcPts val="300"/>
+              </a:spcBef>
+              <a:defRPr sz="1200">
+                <a:solidFill>
+                  <a:srgbClr val="CBD5E1"/>
+                </a:solidFill>
+                <a:latin typeface="Arial"/>
+              </a:defRPr>
+            </a:pPr>
+            <a:r>
+              <a:t>  getProgress()</a:t>
+            </a:r>
+          </a:p>
+        </p:txBody>
+      </p:sp>
+      <p:sp>
+        <p:nvSpPr>
+          <p:cNvPr id="7" name="Box 7"/>
+          <p:cNvSpPr/>
+          <p:nvPr/>
+        </p:nvSpPr>
+        <p:spPr>
+          <a:xfrm>
+            <a:off x="9059520" y="1750000"/>
+            <a:ext cx="1700000" cy="4700000"/>
+          </a:xfrm>
+          <a:prstGeom prst="roundRect">
+            <a:avLst>
+              <a:gd name="adj" fmla="val 16667"/>
+            </a:avLst>
+          </a:prstGeom>
+          <a:solidFill>
+            <a:srgbClr val="0C2340"/>
+          </a:solidFill>
+          <a:ln w="19050">
+            <a:solidFill>
+              <a:srgbClr val="334155"/>
+            </a:solidFill>
+          </a:ln>
+        </p:spPr>
+        <p:txBody>
+          <a:bodyPr wrap="square" lIns="180000" tIns="180000" rIns="180000" bIns="180000">
+            <a:spAutoFit/>
+          </a:bodyPr>
+          <a:lstStyle/>
+          <a:p>
+            <a:pPr>
+              <a:defRPr sz="1400" b="1">
+                <a:solidFill>
+                  <a:srgbClr val="7DD3FC"/>
+                </a:solidFill>
+                <a:latin typeface="Arial"/>
+              </a:defRPr>
+            </a:pPr>
+            <a:r>
+              <a:t>Databases (isolated)</a:t>
+            </a:r>
+          </a:p>
+          <a:p>
+            <a:pPr>
+              <a:spcBef>
+                <a:spcPts val="300"/>
+              </a:spcBef>
+              <a:defRPr sz="1200">
+                <a:solidFill>
+                  <a:srgbClr val="CBD5E1"/>
+                </a:solidFill>
+                <a:latin typeface="Arial"/>
+              </a:defRPr>
+            </a:pPr>
+            <a:r>
+              <a:t>orderdb      :5432</a:t>
+            </a:r>
+          </a:p>
+          <a:p>
+            <a:pPr>
+              <a:spcBef>
+                <a:spcPts val="300"/>
+              </a:spcBef>
+              <a:defRPr sz="1200">
+                <a:solidFill>
+                  <a:srgbClr val="CBD5E1"/>
+                </a:solidFill>
+                <a:latin typeface="Arial"/>
+              </a:defRPr>
+            </a:pPr>
+            <a:r>
+              <a:t>  event_store (JSONB)</a:t>
+            </a:r>
+          </a:p>
+          <a:p>
+            <a:pPr>
+              <a:spcBef>
+                <a:spcPts val="300"/>
+              </a:spcBef>
+              <a:defRPr sz="1200">
+                <a:solidFill>
+                  <a:srgbClr val="CBD5E1"/>
+                </a:solidFill>
+                <a:latin typeface="Arial"/>
+              </a:defRPr>
+            </a:pPr>
+            <a:r>
+              <a:t>  order_snapshots</a:t>
+            </a:r>
+          </a:p>
+          <a:p>
+            <a:pPr>
+              <a:spcBef>
+                <a:spcPts val="300"/>
+              </a:spcBef>
+              <a:defRPr sz="1200">
+                <a:solidFill>
+                  <a:srgbClr val="CBD5E1"/>
+                </a:solidFill>
+                <a:latin typeface="Arial"/>
+              </a:defRPr>
+            </a:pPr>
+            <a:r>
+              <a:t/>
+            </a:r>
+          </a:p>
+          <a:p>
+            <a:pPr>
+              <a:spcBef>
+                <a:spcPts val="300"/>
+              </a:spcBef>
+              <a:defRPr sz="1200">
+                <a:solidFill>
+                  <a:srgbClr val="CBD5E1"/>
+                </a:solidFill>
+                <a:latin typeface="Arial"/>
+              </a:defRPr>
+            </a:pPr>
+            <a:r>
+              <a:t>inventorydb  :5434</a:t>
+            </a:r>
+          </a:p>
+          <a:p>
+            <a:pPr>
+              <a:spcBef>
+                <a:spcPts val="300"/>
+              </a:spcBef>
+              <a:defRPr sz="1200">
+                <a:solidFill>
+                  <a:srgbClr val="CBD5E1"/>
+                </a:solidFill>
+                <a:latin typeface="Arial"/>
+              </a:defRPr>
+            </a:pPr>
+            <a:r>
+              <a:t>  reservations</a:t>
+            </a:r>
+          </a:p>
+          <a:p>
+            <a:pPr>
+              <a:spcBef>
+                <a:spcPts val="300"/>
+              </a:spcBef>
+              <a:defRPr sz="1200">
+                <a:solidFill>
+                  <a:srgbClr val="CBD5E1"/>
+                </a:solidFill>
+                <a:latin typeface="Arial"/>
+              </a:defRPr>
+            </a:pPr>
+            <a:r>
+              <a:t/>
+            </a:r>
+          </a:p>
+          <a:p>
+            <a:pPr>
+              <a:spcBef>
+                <a:spcPts val="300"/>
+              </a:spcBef>
+              <a:defRPr sz="1200">
+                <a:solidFill>
+                  <a:srgbClr val="CBD5E1"/>
+                </a:solidFill>
+                <a:latin typeface="Arial"/>
+              </a:defRPr>
+            </a:pPr>
+            <a:r>
+              <a:t>paymentdb    :5435</a:t>
+            </a:r>
+          </a:p>
+          <a:p>
+            <a:pPr>
+              <a:spcBef>
+                <a:spcPts val="300"/>
+              </a:spcBef>
+              <a:defRPr sz="1200">
+                <a:solidFill>
+                  <a:srgbClr val="CBD5E1"/>
+                </a:solidFill>
+                <a:latin typeface="Arial"/>
+              </a:defRPr>
+            </a:pPr>
+            <a:r>
+              <a:t>  transactions</a:t>
+            </a:r>
+          </a:p>
+          <a:p>
+            <a:pPr>
+              <a:spcBef>
+                <a:spcPts val="300"/>
+              </a:spcBef>
+              <a:defRPr sz="1200">
+                <a:solidFill>
+                  <a:srgbClr val="CBD5E1"/>
+                </a:solidFill>
+                <a:latin typeface="Arial"/>
+              </a:defRPr>
+            </a:pPr>
+            <a:r>
+              <a:t/>
+            </a:r>
+          </a:p>
+          <a:p>
+            <a:pPr>
+              <a:spcBef>
+                <a:spcPts val="300"/>
+              </a:spcBef>
+              <a:defRPr sz="1200">
+                <a:solidFill>
+                  <a:srgbClr val="CBD5E1"/>
+                </a:solidFill>
+                <a:latin typeface="Arial"/>
+              </a:defRPr>
+            </a:pPr>
+            <a:r>
+              <a:t>shippingdb   :5436</a:t>
+            </a:r>
+          </a:p>
+          <a:p>
+            <a:pPr>
+              <a:spcBef>
+                <a:spcPts val="300"/>
+              </a:spcBef>
+              <a:defRPr sz="1200">
+                <a:solidFill>
+                  <a:srgbClr val="CBD5E1"/>
+                </a:solidFill>
+                <a:latin typeface="Arial"/>
+              </a:defRPr>
+            </a:pPr>
+            <a:r>
+              <a:t>  shipments</a:t>
+            </a:r>
+          </a:p>
+          <a:p>
+            <a:pPr>
+              <a:spcBef>
+                <a:spcPts val="300"/>
+              </a:spcBef>
+              <a:defRPr sz="1200">
+                <a:solidFill>
+                  <a:srgbClr val="CBD5E1"/>
+                </a:solidFill>
+                <a:latin typeface="Arial"/>
+              </a:defRPr>
+            </a:pPr>
+            <a:r>
+              <a:t/>
+            </a:r>
+          </a:p>
+          <a:p>
+            <a:pPr>
+              <a:spcBef>
+                <a:spcPts val="300"/>
+              </a:spcBef>
+              <a:defRPr sz="1200">
+                <a:solidFill>
+                  <a:srgbClr val="CBD5E1"/>
+                </a:solidFill>
+                <a:latin typeface="Arial"/>
+              </a:defRPr>
+            </a:pPr>
+            <a:r>
+              <a:t>temporal-pg  :5433</a:t>
+            </a:r>
+          </a:p>
+          <a:p>
+            <a:pPr>
+              <a:spcBef>
+                <a:spcPts val="300"/>
+              </a:spcBef>
+              <a:defRPr sz="1200">
+                <a:solidFill>
+                  <a:srgbClr val="CBD5E1"/>
+                </a:solidFill>
+                <a:latin typeface="Arial"/>
+              </a:defRPr>
+            </a:pPr>
+            <a:r>
+              <a:t>kong-pg      :5440</a:t>
             </a:r>
           </a:p>
         </p:txBody>
@@ -4249,7 +7049,7 @@
                         </a:defRPr>
                       </a:pPr>
                       <a:r>
-                        <a:t>Cancel label &amp; shipping request</a:t>
+                        <a:t>(None — no side effect to undo)</a:t>
                       </a:r>
                     </a:p>
                   </a:txBody>
